--- a/paper/slides.pptx
+++ b/paper/slides.pptx
@@ -5,21 +5,21 @@
     <p:sldMasterId id="2147483648" r:id="rId1"/>
   </p:sldMasterIdLst>
   <p:sldIdLst>
-    <p:sldId id="256" r:id="rId7"/>
-    <p:sldId id="257" r:id="rId8"/>
-    <p:sldId id="258" r:id="rId9"/>
-    <p:sldId id="259" r:id="rId10"/>
-    <p:sldId id="260" r:id="rId11"/>
-    <p:sldId id="261" r:id="rId12"/>
-    <p:sldId id="262" r:id="rId13"/>
-    <p:sldId id="263" r:id="rId14"/>
-    <p:sldId id="264" r:id="rId15"/>
-    <p:sldId id="265" r:id="rId16"/>
-    <p:sldId id="266" r:id="rId17"/>
-    <p:sldId id="267" r:id="rId18"/>
-    <p:sldId id="268" r:id="rId19"/>
+    <p:sldId id="256" r:id="rId2"/>
+    <p:sldId id="257" r:id="rId3"/>
+    <p:sldId id="258" r:id="rId4"/>
+    <p:sldId id="259" r:id="rId5"/>
+    <p:sldId id="260" r:id="rId6"/>
+    <p:sldId id="261" r:id="rId7"/>
+    <p:sldId id="262" r:id="rId8"/>
+    <p:sldId id="263" r:id="rId9"/>
+    <p:sldId id="264" r:id="rId10"/>
+    <p:sldId id="265" r:id="rId11"/>
+    <p:sldId id="266" r:id="rId12"/>
+    <p:sldId id="267" r:id="rId13"/>
+    <p:sldId id="268" r:id="rId14"/>
   </p:sldIdLst>
-  <p:sldSz cx="12191695" cy="6858000" type="screen4x3"/>
+  <p:sldSz cx="12192000" cy="6858000"/>
   <p:notesSz cx="6858000" cy="9144000"/>
   <p:defaultTextStyle>
     <a:defPPr>
@@ -116,6 +116,22 @@
       </a:defRPr>
     </a:lvl9pPr>
   </p:defaultTextStyle>
+  <p:extLst>
+    <p:ext uri="{EFAFB233-063F-42B5-8137-9DF3F51BA10A}">
+      <p15:sldGuideLst xmlns:p15="http://schemas.microsoft.com/office/powerpoint/2012/main">
+        <p15:guide id="1" orient="horz" pos="2160">
+          <p15:clr>
+            <a:srgbClr val="A4A3A4"/>
+          </p15:clr>
+        </p15:guide>
+        <p15:guide id="2" pos="2880">
+          <p15:clr>
+            <a:srgbClr val="A4A3A4"/>
+          </p15:clr>
+        </p15:guide>
+      </p15:sldGuideLst>
+    </p:ext>
+  </p:extLst>
 </p:presentation>
 </file>
 
@@ -157,10 +173,9 @@
           <a:lstStyle/>
           <a:p>
             <a:r>
-              <a:rPr lang="en-US" smtClean="0"/>
+              <a:rPr lang="en-US"/>
               <a:t>Click to edit Master title style</a:t>
             </a:r>
-            <a:endParaRPr lang="en-US"/>
           </a:p>
         </p:txBody>
       </p:sp>
@@ -276,10 +291,9 @@
           </a:lstStyle>
           <a:p>
             <a:r>
-              <a:rPr lang="en-US" smtClean="0"/>
+              <a:rPr lang="en-US"/>
               <a:t>Click to edit Master subtitle style</a:t>
             </a:r>
-            <a:endParaRPr lang="en-US"/>
           </a:p>
         </p:txBody>
       </p:sp>
@@ -300,7 +314,7 @@
           <a:p>
             <a:fld id="{5BCAD085-E8A6-8845-BD4E-CB4CCA059FC4}" type="datetimeFigureOut">
               <a:rPr lang="en-US" smtClean="0"/>
-              <a:t>1/27/13</a:t>
+              <a:t>6/7/2026</a:t>
             </a:fld>
             <a:endParaRPr lang="en-US"/>
           </a:p>
@@ -394,10 +408,9 @@
           <a:lstStyle/>
           <a:p>
             <a:r>
-              <a:rPr lang="en-US" smtClean="0"/>
+              <a:rPr lang="en-US"/>
               <a:t>Click to edit Master title style</a:t>
             </a:r>
-            <a:endParaRPr lang="en-US"/>
           </a:p>
         </p:txBody>
       </p:sp>
@@ -418,38 +431,37 @@
           <a:p>
             <a:pPr lvl="0"/>
             <a:r>
-              <a:rPr lang="en-US" smtClean="0"/>
+              <a:rPr lang="en-US"/>
               <a:t>Click to edit Master text styles</a:t>
             </a:r>
           </a:p>
           <a:p>
             <a:pPr lvl="1"/>
             <a:r>
-              <a:rPr lang="en-US" smtClean="0"/>
+              <a:rPr lang="en-US"/>
               <a:t>Second level</a:t>
             </a:r>
           </a:p>
           <a:p>
             <a:pPr lvl="2"/>
             <a:r>
-              <a:rPr lang="en-US" smtClean="0"/>
+              <a:rPr lang="en-US"/>
               <a:t>Third level</a:t>
             </a:r>
           </a:p>
           <a:p>
             <a:pPr lvl="3"/>
             <a:r>
-              <a:rPr lang="en-US" smtClean="0"/>
+              <a:rPr lang="en-US"/>
               <a:t>Fourth level</a:t>
             </a:r>
           </a:p>
           <a:p>
             <a:pPr lvl="4"/>
             <a:r>
-              <a:rPr lang="en-US" smtClean="0"/>
+              <a:rPr lang="en-US"/>
               <a:t>Fifth level</a:t>
             </a:r>
-            <a:endParaRPr lang="en-US"/>
           </a:p>
         </p:txBody>
       </p:sp>
@@ -470,7 +482,7 @@
           <a:p>
             <a:fld id="{5BCAD085-E8A6-8845-BD4E-CB4CCA059FC4}" type="datetimeFigureOut">
               <a:rPr lang="en-US" smtClean="0"/>
-              <a:t>1/27/13</a:t>
+              <a:t>6/7/2026</a:t>
             </a:fld>
             <a:endParaRPr lang="en-US"/>
           </a:p>
@@ -569,10 +581,9 @@
           <a:lstStyle/>
           <a:p>
             <a:r>
-              <a:rPr lang="en-US" smtClean="0"/>
+              <a:rPr lang="en-US"/>
               <a:t>Click to edit Master title style</a:t>
             </a:r>
-            <a:endParaRPr lang="en-US"/>
           </a:p>
         </p:txBody>
       </p:sp>
@@ -598,38 +609,37 @@
           <a:p>
             <a:pPr lvl="0"/>
             <a:r>
-              <a:rPr lang="en-US" smtClean="0"/>
+              <a:rPr lang="en-US"/>
               <a:t>Click to edit Master text styles</a:t>
             </a:r>
           </a:p>
           <a:p>
             <a:pPr lvl="1"/>
             <a:r>
-              <a:rPr lang="en-US" smtClean="0"/>
+              <a:rPr lang="en-US"/>
               <a:t>Second level</a:t>
             </a:r>
           </a:p>
           <a:p>
             <a:pPr lvl="2"/>
             <a:r>
-              <a:rPr lang="en-US" smtClean="0"/>
+              <a:rPr lang="en-US"/>
               <a:t>Third level</a:t>
             </a:r>
           </a:p>
           <a:p>
             <a:pPr lvl="3"/>
             <a:r>
-              <a:rPr lang="en-US" smtClean="0"/>
+              <a:rPr lang="en-US"/>
               <a:t>Fourth level</a:t>
             </a:r>
           </a:p>
           <a:p>
             <a:pPr lvl="4"/>
             <a:r>
-              <a:rPr lang="en-US" smtClean="0"/>
+              <a:rPr lang="en-US"/>
               <a:t>Fifth level</a:t>
             </a:r>
-            <a:endParaRPr lang="en-US"/>
           </a:p>
         </p:txBody>
       </p:sp>
@@ -650,7 +660,7 @@
           <a:p>
             <a:fld id="{5BCAD085-E8A6-8845-BD4E-CB4CCA059FC4}" type="datetimeFigureOut">
               <a:rPr lang="en-US" smtClean="0"/>
-              <a:t>1/27/13</a:t>
+              <a:t>6/7/2026</a:t>
             </a:fld>
             <a:endParaRPr lang="en-US"/>
           </a:p>
@@ -744,10 +754,9 @@
           <a:lstStyle/>
           <a:p>
             <a:r>
-              <a:rPr lang="en-US" smtClean="0"/>
+              <a:rPr lang="en-US"/>
               <a:t>Click to edit Master title style</a:t>
             </a:r>
-            <a:endParaRPr lang="en-US"/>
           </a:p>
         </p:txBody>
       </p:sp>
@@ -768,38 +777,37 @@
           <a:p>
             <a:pPr lvl="0"/>
             <a:r>
-              <a:rPr lang="en-US" smtClean="0"/>
+              <a:rPr lang="en-US"/>
               <a:t>Click to edit Master text styles</a:t>
             </a:r>
           </a:p>
           <a:p>
             <a:pPr lvl="1"/>
             <a:r>
-              <a:rPr lang="en-US" smtClean="0"/>
+              <a:rPr lang="en-US"/>
               <a:t>Second level</a:t>
             </a:r>
           </a:p>
           <a:p>
             <a:pPr lvl="2"/>
             <a:r>
-              <a:rPr lang="en-US" smtClean="0"/>
+              <a:rPr lang="en-US"/>
               <a:t>Third level</a:t>
             </a:r>
           </a:p>
           <a:p>
             <a:pPr lvl="3"/>
             <a:r>
-              <a:rPr lang="en-US" smtClean="0"/>
+              <a:rPr lang="en-US"/>
               <a:t>Fourth level</a:t>
             </a:r>
           </a:p>
           <a:p>
             <a:pPr lvl="4"/>
             <a:r>
-              <a:rPr lang="en-US" smtClean="0"/>
+              <a:rPr lang="en-US"/>
               <a:t>Fifth level</a:t>
             </a:r>
-            <a:endParaRPr lang="en-US"/>
           </a:p>
         </p:txBody>
       </p:sp>
@@ -820,7 +828,7 @@
           <a:p>
             <a:fld id="{5BCAD085-E8A6-8845-BD4E-CB4CCA059FC4}" type="datetimeFigureOut">
               <a:rPr lang="en-US" smtClean="0"/>
-              <a:t>1/27/13</a:t>
+              <a:t>6/7/2026</a:t>
             </a:fld>
             <a:endParaRPr lang="en-US"/>
           </a:p>
@@ -923,10 +931,9 @@
           </a:lstStyle>
           <a:p>
             <a:r>
-              <a:rPr lang="en-US" smtClean="0"/>
+              <a:rPr lang="en-US"/>
               <a:t>Click to edit Master title style</a:t>
             </a:r>
-            <a:endParaRPr lang="en-US"/>
           </a:p>
         </p:txBody>
       </p:sp>
@@ -1043,7 +1050,7 @@
           <a:p>
             <a:pPr lvl="0"/>
             <a:r>
-              <a:rPr lang="en-US" smtClean="0"/>
+              <a:rPr lang="en-US"/>
               <a:t>Click to edit Master text styles</a:t>
             </a:r>
           </a:p>
@@ -1066,7 +1073,7 @@
           <a:p>
             <a:fld id="{5BCAD085-E8A6-8845-BD4E-CB4CCA059FC4}" type="datetimeFigureOut">
               <a:rPr lang="en-US" smtClean="0"/>
-              <a:t>1/27/13</a:t>
+              <a:t>6/7/2026</a:t>
             </a:fld>
             <a:endParaRPr lang="en-US"/>
           </a:p>
@@ -1160,10 +1167,9 @@
           <a:lstStyle/>
           <a:p>
             <a:r>
-              <a:rPr lang="en-US" smtClean="0"/>
+              <a:rPr lang="en-US"/>
               <a:t>Click to edit Master title style</a:t>
             </a:r>
-            <a:endParaRPr lang="en-US"/>
           </a:p>
         </p:txBody>
       </p:sp>
@@ -1217,38 +1223,37 @@
           <a:p>
             <a:pPr lvl="0"/>
             <a:r>
-              <a:rPr lang="en-US" smtClean="0"/>
+              <a:rPr lang="en-US"/>
               <a:t>Click to edit Master text styles</a:t>
             </a:r>
           </a:p>
           <a:p>
             <a:pPr lvl="1"/>
             <a:r>
-              <a:rPr lang="en-US" smtClean="0"/>
+              <a:rPr lang="en-US"/>
               <a:t>Second level</a:t>
             </a:r>
           </a:p>
           <a:p>
             <a:pPr lvl="2"/>
             <a:r>
-              <a:rPr lang="en-US" smtClean="0"/>
+              <a:rPr lang="en-US"/>
               <a:t>Third level</a:t>
             </a:r>
           </a:p>
           <a:p>
             <a:pPr lvl="3"/>
             <a:r>
-              <a:rPr lang="en-US" smtClean="0"/>
+              <a:rPr lang="en-US"/>
               <a:t>Fourth level</a:t>
             </a:r>
           </a:p>
           <a:p>
             <a:pPr lvl="4"/>
             <a:r>
-              <a:rPr lang="en-US" smtClean="0"/>
+              <a:rPr lang="en-US"/>
               <a:t>Fifth level</a:t>
             </a:r>
-            <a:endParaRPr lang="en-US"/>
           </a:p>
         </p:txBody>
       </p:sp>
@@ -1302,38 +1307,37 @@
           <a:p>
             <a:pPr lvl="0"/>
             <a:r>
-              <a:rPr lang="en-US" smtClean="0"/>
+              <a:rPr lang="en-US"/>
               <a:t>Click to edit Master text styles</a:t>
             </a:r>
           </a:p>
           <a:p>
             <a:pPr lvl="1"/>
             <a:r>
-              <a:rPr lang="en-US" smtClean="0"/>
+              <a:rPr lang="en-US"/>
               <a:t>Second level</a:t>
             </a:r>
           </a:p>
           <a:p>
             <a:pPr lvl="2"/>
             <a:r>
-              <a:rPr lang="en-US" smtClean="0"/>
+              <a:rPr lang="en-US"/>
               <a:t>Third level</a:t>
             </a:r>
           </a:p>
           <a:p>
             <a:pPr lvl="3"/>
             <a:r>
-              <a:rPr lang="en-US" smtClean="0"/>
+              <a:rPr lang="en-US"/>
               <a:t>Fourth level</a:t>
             </a:r>
           </a:p>
           <a:p>
             <a:pPr lvl="4"/>
             <a:r>
-              <a:rPr lang="en-US" smtClean="0"/>
+              <a:rPr lang="en-US"/>
               <a:t>Fifth level</a:t>
             </a:r>
-            <a:endParaRPr lang="en-US"/>
           </a:p>
         </p:txBody>
       </p:sp>
@@ -1354,7 +1358,7 @@
           <a:p>
             <a:fld id="{5BCAD085-E8A6-8845-BD4E-CB4CCA059FC4}" type="datetimeFigureOut">
               <a:rPr lang="en-US" smtClean="0"/>
-              <a:t>1/27/13</a:t>
+              <a:t>6/7/2026</a:t>
             </a:fld>
             <a:endParaRPr lang="en-US"/>
           </a:p>
@@ -1452,10 +1456,9 @@
           </a:lstStyle>
           <a:p>
             <a:r>
-              <a:rPr lang="en-US" smtClean="0"/>
+              <a:rPr lang="en-US"/>
               <a:t>Click to edit Master title style</a:t>
             </a:r>
-            <a:endParaRPr lang="en-US"/>
           </a:p>
         </p:txBody>
       </p:sp>
@@ -1518,7 +1521,7 @@
           <a:p>
             <a:pPr lvl="0"/>
             <a:r>
-              <a:rPr lang="en-US" smtClean="0"/>
+              <a:rPr lang="en-US"/>
               <a:t>Click to edit Master text styles</a:t>
             </a:r>
           </a:p>
@@ -1574,38 +1577,37 @@
           <a:p>
             <a:pPr lvl="0"/>
             <a:r>
-              <a:rPr lang="en-US" smtClean="0"/>
+              <a:rPr lang="en-US"/>
               <a:t>Click to edit Master text styles</a:t>
             </a:r>
           </a:p>
           <a:p>
             <a:pPr lvl="1"/>
             <a:r>
-              <a:rPr lang="en-US" smtClean="0"/>
+              <a:rPr lang="en-US"/>
               <a:t>Second level</a:t>
             </a:r>
           </a:p>
           <a:p>
             <a:pPr lvl="2"/>
             <a:r>
-              <a:rPr lang="en-US" smtClean="0"/>
+              <a:rPr lang="en-US"/>
               <a:t>Third level</a:t>
             </a:r>
           </a:p>
           <a:p>
             <a:pPr lvl="3"/>
             <a:r>
-              <a:rPr lang="en-US" smtClean="0"/>
+              <a:rPr lang="en-US"/>
               <a:t>Fourth level</a:t>
             </a:r>
           </a:p>
           <a:p>
             <a:pPr lvl="4"/>
             <a:r>
-              <a:rPr lang="en-US" smtClean="0"/>
+              <a:rPr lang="en-US"/>
               <a:t>Fifth level</a:t>
             </a:r>
-            <a:endParaRPr lang="en-US"/>
           </a:p>
         </p:txBody>
       </p:sp>
@@ -1668,7 +1670,7 @@
           <a:p>
             <a:pPr lvl="0"/>
             <a:r>
-              <a:rPr lang="en-US" smtClean="0"/>
+              <a:rPr lang="en-US"/>
               <a:t>Click to edit Master text styles</a:t>
             </a:r>
           </a:p>
@@ -1724,38 +1726,37 @@
           <a:p>
             <a:pPr lvl="0"/>
             <a:r>
-              <a:rPr lang="en-US" smtClean="0"/>
+              <a:rPr lang="en-US"/>
               <a:t>Click to edit Master text styles</a:t>
             </a:r>
           </a:p>
           <a:p>
             <a:pPr lvl="1"/>
             <a:r>
-              <a:rPr lang="en-US" smtClean="0"/>
+              <a:rPr lang="en-US"/>
               <a:t>Second level</a:t>
             </a:r>
           </a:p>
           <a:p>
             <a:pPr lvl="2"/>
             <a:r>
-              <a:rPr lang="en-US" smtClean="0"/>
+              <a:rPr lang="en-US"/>
               <a:t>Third level</a:t>
             </a:r>
           </a:p>
           <a:p>
             <a:pPr lvl="3"/>
             <a:r>
-              <a:rPr lang="en-US" smtClean="0"/>
+              <a:rPr lang="en-US"/>
               <a:t>Fourth level</a:t>
             </a:r>
           </a:p>
           <a:p>
             <a:pPr lvl="4"/>
             <a:r>
-              <a:rPr lang="en-US" smtClean="0"/>
+              <a:rPr lang="en-US"/>
               <a:t>Fifth level</a:t>
             </a:r>
-            <a:endParaRPr lang="en-US"/>
           </a:p>
         </p:txBody>
       </p:sp>
@@ -1776,7 +1777,7 @@
           <a:p>
             <a:fld id="{5BCAD085-E8A6-8845-BD4E-CB4CCA059FC4}" type="datetimeFigureOut">
               <a:rPr lang="en-US" smtClean="0"/>
-              <a:t>1/27/13</a:t>
+              <a:t>6/7/2026</a:t>
             </a:fld>
             <a:endParaRPr lang="en-US"/>
           </a:p>
@@ -1870,10 +1871,9 @@
           <a:lstStyle/>
           <a:p>
             <a:r>
-              <a:rPr lang="en-US" smtClean="0"/>
+              <a:rPr lang="en-US"/>
               <a:t>Click to edit Master title style</a:t>
             </a:r>
-            <a:endParaRPr lang="en-US"/>
           </a:p>
         </p:txBody>
       </p:sp>
@@ -1894,7 +1894,7 @@
           <a:p>
             <a:fld id="{5BCAD085-E8A6-8845-BD4E-CB4CCA059FC4}" type="datetimeFigureOut">
               <a:rPr lang="en-US" smtClean="0"/>
-              <a:t>1/27/13</a:t>
+              <a:t>6/7/2026</a:t>
             </a:fld>
             <a:endParaRPr lang="en-US"/>
           </a:p>
@@ -1989,7 +1989,7 @@
           <a:p>
             <a:fld id="{5BCAD085-E8A6-8845-BD4E-CB4CCA059FC4}" type="datetimeFigureOut">
               <a:rPr lang="en-US" smtClean="0"/>
-              <a:t>1/27/13</a:t>
+              <a:t>6/7/2026</a:t>
             </a:fld>
             <a:endParaRPr lang="en-US"/>
           </a:p>
@@ -2092,10 +2092,9 @@
           </a:lstStyle>
           <a:p>
             <a:r>
-              <a:rPr lang="en-US" smtClean="0"/>
+              <a:rPr lang="en-US"/>
               <a:t>Click to edit Master title style</a:t>
             </a:r>
-            <a:endParaRPr lang="en-US"/>
           </a:p>
         </p:txBody>
       </p:sp>
@@ -2149,38 +2148,37 @@
           <a:p>
             <a:pPr lvl="0"/>
             <a:r>
-              <a:rPr lang="en-US" smtClean="0"/>
+              <a:rPr lang="en-US"/>
               <a:t>Click to edit Master text styles</a:t>
             </a:r>
           </a:p>
           <a:p>
             <a:pPr lvl="1"/>
             <a:r>
-              <a:rPr lang="en-US" smtClean="0"/>
+              <a:rPr lang="en-US"/>
               <a:t>Second level</a:t>
             </a:r>
           </a:p>
           <a:p>
             <a:pPr lvl="2"/>
             <a:r>
-              <a:rPr lang="en-US" smtClean="0"/>
+              <a:rPr lang="en-US"/>
               <a:t>Third level</a:t>
             </a:r>
           </a:p>
           <a:p>
             <a:pPr lvl="3"/>
             <a:r>
-              <a:rPr lang="en-US" smtClean="0"/>
+              <a:rPr lang="en-US"/>
               <a:t>Fourth level</a:t>
             </a:r>
           </a:p>
           <a:p>
             <a:pPr lvl="4"/>
             <a:r>
-              <a:rPr lang="en-US" smtClean="0"/>
+              <a:rPr lang="en-US"/>
               <a:t>Fifth level</a:t>
             </a:r>
-            <a:endParaRPr lang="en-US"/>
           </a:p>
         </p:txBody>
       </p:sp>
@@ -2243,7 +2241,7 @@
           <a:p>
             <a:pPr lvl="0"/>
             <a:r>
-              <a:rPr lang="en-US" smtClean="0"/>
+              <a:rPr lang="en-US"/>
               <a:t>Click to edit Master text styles</a:t>
             </a:r>
           </a:p>
@@ -2266,7 +2264,7 @@
           <a:p>
             <a:fld id="{5BCAD085-E8A6-8845-BD4E-CB4CCA059FC4}" type="datetimeFigureOut">
               <a:rPr lang="en-US" smtClean="0"/>
-              <a:t>1/27/13</a:t>
+              <a:t>6/7/2026</a:t>
             </a:fld>
             <a:endParaRPr lang="en-US"/>
           </a:p>
@@ -2369,10 +2367,9 @@
           </a:lstStyle>
           <a:p>
             <a:r>
-              <a:rPr lang="en-US" smtClean="0"/>
+              <a:rPr lang="en-US"/>
               <a:t>Click to edit Master title style</a:t>
             </a:r>
-            <a:endParaRPr lang="en-US"/>
           </a:p>
         </p:txBody>
       </p:sp>
@@ -2496,7 +2493,7 @@
           <a:p>
             <a:pPr lvl="0"/>
             <a:r>
-              <a:rPr lang="en-US" smtClean="0"/>
+              <a:rPr lang="en-US"/>
               <a:t>Click to edit Master text styles</a:t>
             </a:r>
           </a:p>
@@ -2519,7 +2516,7 @@
           <a:p>
             <a:fld id="{5BCAD085-E8A6-8845-BD4E-CB4CCA059FC4}" type="datetimeFigureOut">
               <a:rPr lang="en-US" smtClean="0"/>
-              <a:t>1/27/13</a:t>
+              <a:t>6/7/2026</a:t>
             </a:fld>
             <a:endParaRPr lang="en-US"/>
           </a:p>
@@ -2628,10 +2625,9 @@
           <a:lstStyle/>
           <a:p>
             <a:r>
-              <a:rPr lang="en-US" smtClean="0"/>
+              <a:rPr lang="en-US"/>
               <a:t>Click to edit Master title style</a:t>
             </a:r>
-            <a:endParaRPr lang="en-US"/>
           </a:p>
         </p:txBody>
       </p:sp>
@@ -2662,38 +2658,37 @@
           <a:p>
             <a:pPr lvl="0"/>
             <a:r>
-              <a:rPr lang="en-US" smtClean="0"/>
+              <a:rPr lang="en-US"/>
               <a:t>Click to edit Master text styles</a:t>
             </a:r>
           </a:p>
           <a:p>
             <a:pPr lvl="1"/>
             <a:r>
-              <a:rPr lang="en-US" smtClean="0"/>
+              <a:rPr lang="en-US"/>
               <a:t>Second level</a:t>
             </a:r>
           </a:p>
           <a:p>
             <a:pPr lvl="2"/>
             <a:r>
-              <a:rPr lang="en-US" smtClean="0"/>
+              <a:rPr lang="en-US"/>
               <a:t>Third level</a:t>
             </a:r>
           </a:p>
           <a:p>
             <a:pPr lvl="3"/>
             <a:r>
-              <a:rPr lang="en-US" smtClean="0"/>
+              <a:rPr lang="en-US"/>
               <a:t>Fourth level</a:t>
             </a:r>
           </a:p>
           <a:p>
             <a:pPr lvl="4"/>
             <a:r>
-              <a:rPr lang="en-US" smtClean="0"/>
+              <a:rPr lang="en-US"/>
               <a:t>Fifth level</a:t>
             </a:r>
-            <a:endParaRPr lang="en-US"/>
           </a:p>
         </p:txBody>
       </p:sp>
@@ -2732,7 +2727,7 @@
           <a:p>
             <a:fld id="{5BCAD085-E8A6-8845-BD4E-CB4CCA059FC4}" type="datetimeFigureOut">
               <a:rPr lang="en-US" smtClean="0"/>
-              <a:t>1/27/13</a:t>
+              <a:t>6/7/2026</a:t>
             </a:fld>
             <a:endParaRPr lang="en-US"/>
           </a:p>
@@ -3091,7 +3086,7 @@
 </file>
 
 <file path=ppt/slides/slide1.xml><?xml version="1.0" encoding="utf-8"?>
-<p:sld xmlns:a="http://schemas.openxmlformats.org/drawingml/2006/main" xmlns:p="http://schemas.openxmlformats.org/presentationml/2006/main" xmlns:r="http://schemas.openxmlformats.org/officeDocument/2006/relationships">
+<p:sld xmlns:a="http://schemas.openxmlformats.org/drawingml/2006/main" xmlns:r="http://schemas.openxmlformats.org/officeDocument/2006/relationships" xmlns:p="http://schemas.openxmlformats.org/presentationml/2006/main">
   <p:cSld>
     <p:spTree>
       <p:nvGrpSpPr>
@@ -3099,7 +3094,14 @@
         <p:cNvGrpSpPr/>
         <p:nvPr/>
       </p:nvGrpSpPr>
-      <p:grpSpPr/>
+      <p:grpSpPr>
+        <a:xfrm>
+          <a:off x="0" y="0"/>
+          <a:ext cx="0" cy="0"/>
+          <a:chOff x="0" y="0"/>
+          <a:chExt cx="0" cy="0"/>
+        </a:xfrm>
+      </p:grpSpPr>
       <p:sp>
         <p:nvSpPr>
           <p:cNvPr id="2" name="Rectangle 1"/>
@@ -3140,6 +3142,7 @@
           <a:lstStyle/>
           <a:p>
             <a:pPr algn="ctr"/>
+            <a:endParaRPr/>
           </a:p>
         </p:txBody>
       </p:sp>
@@ -3232,7 +3235,9 @@
             <a:spAutoFit/>
           </a:bodyPr>
           <a:lstStyle/>
-          <a:p/>
+          <a:p>
+            <a:endParaRPr/>
+          </a:p>
           <a:p>
             <a:pPr algn="ctr"/>
             <a:r>
@@ -3288,7 +3293,7 @@
 </file>
 
 <file path=ppt/slides/slide10.xml><?xml version="1.0" encoding="utf-8"?>
-<p:sld xmlns:a="http://schemas.openxmlformats.org/drawingml/2006/main" xmlns:p="http://schemas.openxmlformats.org/presentationml/2006/main" xmlns:r="http://schemas.openxmlformats.org/officeDocument/2006/relationships">
+<p:sld xmlns:a="http://schemas.openxmlformats.org/drawingml/2006/main" xmlns:r="http://schemas.openxmlformats.org/officeDocument/2006/relationships" xmlns:p="http://schemas.openxmlformats.org/presentationml/2006/main">
   <p:cSld>
     <p:spTree>
       <p:nvGrpSpPr>
@@ -3296,7 +3301,14 @@
         <p:cNvGrpSpPr/>
         <p:nvPr/>
       </p:nvGrpSpPr>
-      <p:grpSpPr/>
+      <p:grpSpPr>
+        <a:xfrm>
+          <a:off x="0" y="0"/>
+          <a:ext cx="0" cy="0"/>
+          <a:chOff x="0" y="0"/>
+          <a:chExt cx="0" cy="0"/>
+        </a:xfrm>
+      </p:grpSpPr>
       <p:sp>
         <p:nvSpPr>
           <p:cNvPr id="2" name="TextBox 1"/>
@@ -3370,6 +3382,7 @@
           <a:lstStyle/>
           <a:p>
             <a:pPr algn="ctr"/>
+            <a:endParaRPr/>
           </a:p>
         </p:txBody>
       </p:sp>
@@ -3599,7 +3612,7 @@
 </file>
 
 <file path=ppt/slides/slide11.xml><?xml version="1.0" encoding="utf-8"?>
-<p:sld xmlns:a="http://schemas.openxmlformats.org/drawingml/2006/main" xmlns:p="http://schemas.openxmlformats.org/presentationml/2006/main" xmlns:r="http://schemas.openxmlformats.org/officeDocument/2006/relationships">
+<p:sld xmlns:a="http://schemas.openxmlformats.org/drawingml/2006/main" xmlns:r="http://schemas.openxmlformats.org/officeDocument/2006/relationships" xmlns:p="http://schemas.openxmlformats.org/presentationml/2006/main">
   <p:cSld>
     <p:spTree>
       <p:nvGrpSpPr>
@@ -3607,7 +3620,14 @@
         <p:cNvGrpSpPr/>
         <p:nvPr/>
       </p:nvGrpSpPr>
-      <p:grpSpPr/>
+      <p:grpSpPr>
+        <a:xfrm>
+          <a:off x="0" y="0"/>
+          <a:ext cx="0" cy="0"/>
+          <a:chOff x="0" y="0"/>
+          <a:chExt cx="0" cy="0"/>
+        </a:xfrm>
+      </p:grpSpPr>
       <p:sp>
         <p:nvSpPr>
           <p:cNvPr id="2" name="TextBox 1"/>
@@ -3681,6 +3701,7 @@
           <a:lstStyle/>
           <a:p>
             <a:pPr algn="ctr"/>
+            <a:endParaRPr/>
           </a:p>
         </p:txBody>
       </p:sp>
@@ -3693,7 +3714,7 @@
         <p:spPr>
           <a:xfrm>
             <a:off x="731520" y="1417320"/>
-            <a:ext cx="10789920" cy="4937760"/>
+            <a:ext cx="10789920" cy="2154436"/>
           </a:xfrm>
           <a:prstGeom prst="rect">
             <a:avLst/>
@@ -3715,7 +3736,7 @@
               </a:spcAft>
             </a:pPr>
             <a:r>
-              <a:rPr sz="1900">
+              <a:rPr sz="1900" dirty="0">
                 <a:solidFill>
                   <a:srgbClr val="B0302A"/>
                 </a:solidFill>
@@ -3723,7 +3744,7 @@
               <a:t>•  </a:t>
             </a:r>
             <a:r>
-              <a:rPr sz="1900" b="1">
+              <a:rPr sz="1900" b="1" dirty="0">
                 <a:solidFill>
                   <a:srgbClr val="B0302A"/>
                 </a:solidFill>
@@ -3731,12 +3752,28 @@
               <a:t>Scope:</a:t>
             </a:r>
             <a:r>
-              <a:rPr sz="1900" b="0">
-                <a:solidFill>
-                  <a:srgbClr val="222222"/>
-                </a:solidFill>
-              </a:rPr>
-              <a:t> two languages, two LoRA ranks, mostly single-seed, one base model, isolated words, no adapter baseline.</a:t>
+              <a:rPr sz="1900" b="0" dirty="0">
+                <a:solidFill>
+                  <a:srgbClr val="222222"/>
+                </a:solidFill>
+              </a:rPr>
+              <a:t> two languages, two </a:t>
+            </a:r>
+            <a:r>
+              <a:rPr sz="1900" b="0" dirty="0" err="1">
+                <a:solidFill>
+                  <a:srgbClr val="222222"/>
+                </a:solidFill>
+              </a:rPr>
+              <a:t>LoRA</a:t>
+            </a:r>
+            <a:r>
+              <a:rPr sz="1900" b="0" dirty="0">
+                <a:solidFill>
+                  <a:srgbClr val="222222"/>
+                </a:solidFill>
+              </a:rPr>
+              <a:t> ranks, mostly single-seed, one base model, isolated words, no adapter baseline.</a:t>
             </a:r>
           </a:p>
           <a:p>
@@ -3749,7 +3786,7 @@
               </a:spcAft>
             </a:pPr>
             <a:r>
-              <a:rPr sz="1900">
+              <a:rPr sz="1900" dirty="0">
                 <a:solidFill>
                   <a:srgbClr val="B0302A"/>
                 </a:solidFill>
@@ -3757,7 +3794,7 @@
               <a:t>•  </a:t>
             </a:r>
             <a:r>
-              <a:rPr sz="1900" b="1">
+              <a:rPr sz="1900" b="1" dirty="0">
                 <a:solidFill>
                   <a:srgbClr val="B0302A"/>
                 </a:solidFill>
@@ -3765,12 +3802,28 @@
               <a:t>Threat to validity:</a:t>
             </a:r>
             <a:r>
-              <a:rPr sz="1900" b="0">
-                <a:solidFill>
-                  <a:srgbClr val="222222"/>
-                </a:solidFill>
-              </a:rPr>
-              <a:t> Greek zero-shot likely inflated by WikiPron/SIGMORPHON pretraining overlap (within-split leakage is 0% exact).</a:t>
+              <a:rPr sz="1900" b="0" dirty="0">
+                <a:solidFill>
+                  <a:srgbClr val="222222"/>
+                </a:solidFill>
+              </a:rPr>
+              <a:t> Greek zero-shot likely inflated by </a:t>
+            </a:r>
+            <a:r>
+              <a:rPr sz="1900" b="0" dirty="0" err="1">
+                <a:solidFill>
+                  <a:srgbClr val="222222"/>
+                </a:solidFill>
+              </a:rPr>
+              <a:t>WikiPron</a:t>
+            </a:r>
+            <a:r>
+              <a:rPr sz="1900" b="0" dirty="0">
+                <a:solidFill>
+                  <a:srgbClr val="222222"/>
+                </a:solidFill>
+              </a:rPr>
+              <a:t>/SIGMORPHON pretraining overlap (within-split leakage is 0% exact).</a:t>
             </a:r>
           </a:p>
           <a:p>
@@ -3783,7 +3836,7 @@
               </a:spcAft>
             </a:pPr>
             <a:r>
-              <a:rPr sz="1900">
+              <a:rPr sz="1900" dirty="0">
                 <a:solidFill>
                   <a:srgbClr val="B0302A"/>
                 </a:solidFill>
@@ -3791,49 +3844,15 @@
               <a:t>•  </a:t>
             </a:r>
             <a:r>
-              <a:rPr sz="1900" b="1">
+              <a:rPr sz="1900" b="1" dirty="0">
                 <a:solidFill>
                   <a:srgbClr val="B0302A"/>
                 </a:solidFill>
               </a:rPr>
-              <a:t>Metric:</a:t>
-            </a:r>
-            <a:r>
-              <a:rPr sz="1900" b="0">
-                <a:solidFill>
-                  <a:srgbClr val="222222"/>
-                </a:solidFill>
-              </a:rPr>
-              <a:t> character-level PER is internally consistent but not the official phoneme-token PER.</a:t>
-            </a:r>
-          </a:p>
-          <a:p>
-            <a:pPr>
-              <a:spcBef>
-                <a:spcPts val="200"/>
-              </a:spcBef>
-              <a:spcAft>
-                <a:spcPts val="1000"/>
-              </a:spcAft>
-            </a:pPr>
-            <a:r>
-              <a:rPr sz="1900">
-                <a:solidFill>
-                  <a:srgbClr val="B0302A"/>
-                </a:solidFill>
-              </a:rPr>
-              <a:t>•  </a:t>
-            </a:r>
-            <a:r>
-              <a:rPr sz="1900" b="1">
-                <a:solidFill>
-                  <a:srgbClr val="B0302A"/>
-                </a:solidFill>
-              </a:rPr>
               <a:t>Future:</a:t>
             </a:r>
             <a:r>
-              <a:rPr sz="1900" b="0">
+              <a:rPr sz="1900" b="0" dirty="0">
                 <a:solidFill>
                   <a:srgbClr val="222222"/>
                 </a:solidFill>
@@ -3852,7 +3871,7 @@
 </file>
 
 <file path=ppt/slides/slide12.xml><?xml version="1.0" encoding="utf-8"?>
-<p:sld xmlns:a="http://schemas.openxmlformats.org/drawingml/2006/main" xmlns:p="http://schemas.openxmlformats.org/presentationml/2006/main" xmlns:r="http://schemas.openxmlformats.org/officeDocument/2006/relationships">
+<p:sld xmlns:a="http://schemas.openxmlformats.org/drawingml/2006/main" xmlns:r="http://schemas.openxmlformats.org/officeDocument/2006/relationships" xmlns:p="http://schemas.openxmlformats.org/presentationml/2006/main">
   <p:cSld>
     <p:spTree>
       <p:nvGrpSpPr>
@@ -3860,7 +3879,14 @@
         <p:cNvGrpSpPr/>
         <p:nvPr/>
       </p:nvGrpSpPr>
-      <p:grpSpPr/>
+      <p:grpSpPr>
+        <a:xfrm>
+          <a:off x="0" y="0"/>
+          <a:ext cx="0" cy="0"/>
+          <a:chOff x="0" y="0"/>
+          <a:chExt cx="0" cy="0"/>
+        </a:xfrm>
+      </p:grpSpPr>
       <p:sp>
         <p:nvSpPr>
           <p:cNvPr id="2" name="TextBox 1"/>
@@ -3934,6 +3960,7 @@
           <a:lstStyle/>
           <a:p>
             <a:pPr algn="ctr"/>
+            <a:endParaRPr/>
           </a:p>
         </p:txBody>
       </p:sp>
@@ -4122,7 +4149,7 @@
           </a:fontRef>
         </p:style>
         <p:txBody>
-          <a:bodyPr rtlCol="0" anchor="ctr" wrap="square"/>
+          <a:bodyPr wrap="square" rtlCol="0" anchor="ctr"/>
           <a:lstStyle/>
           <a:p>
             <a:pPr algn="ctr"/>
@@ -4146,7 +4173,7 @@
 </file>
 
 <file path=ppt/slides/slide13.xml><?xml version="1.0" encoding="utf-8"?>
-<p:sld xmlns:a="http://schemas.openxmlformats.org/drawingml/2006/main" xmlns:p="http://schemas.openxmlformats.org/presentationml/2006/main" xmlns:r="http://schemas.openxmlformats.org/officeDocument/2006/relationships">
+<p:sld xmlns:a="http://schemas.openxmlformats.org/drawingml/2006/main" xmlns:r="http://schemas.openxmlformats.org/officeDocument/2006/relationships" xmlns:p="http://schemas.openxmlformats.org/presentationml/2006/main">
   <p:cSld>
     <p:spTree>
       <p:nvGrpSpPr>
@@ -4154,7 +4181,14 @@
         <p:cNvGrpSpPr/>
         <p:nvPr/>
       </p:nvGrpSpPr>
-      <p:grpSpPr/>
+      <p:grpSpPr>
+        <a:xfrm>
+          <a:off x="0" y="0"/>
+          <a:ext cx="0" cy="0"/>
+          <a:chOff x="0" y="0"/>
+          <a:chExt cx="0" cy="0"/>
+        </a:xfrm>
+      </p:grpSpPr>
       <p:sp>
         <p:nvSpPr>
           <p:cNvPr id="2" name="TextBox 1"/>
@@ -4209,7 +4243,7 @@
 </file>
 
 <file path=ppt/slides/slide2.xml><?xml version="1.0" encoding="utf-8"?>
-<p:sld xmlns:a="http://schemas.openxmlformats.org/drawingml/2006/main" xmlns:p="http://schemas.openxmlformats.org/presentationml/2006/main" xmlns:r="http://schemas.openxmlformats.org/officeDocument/2006/relationships">
+<p:sld xmlns:a="http://schemas.openxmlformats.org/drawingml/2006/main" xmlns:r="http://schemas.openxmlformats.org/officeDocument/2006/relationships" xmlns:p="http://schemas.openxmlformats.org/presentationml/2006/main">
   <p:cSld>
     <p:spTree>
       <p:nvGrpSpPr>
@@ -4217,7 +4251,14 @@
         <p:cNvGrpSpPr/>
         <p:nvPr/>
       </p:nvGrpSpPr>
-      <p:grpSpPr/>
+      <p:grpSpPr>
+        <a:xfrm>
+          <a:off x="0" y="0"/>
+          <a:ext cx="0" cy="0"/>
+          <a:chOff x="0" y="0"/>
+          <a:chExt cx="0" cy="0"/>
+        </a:xfrm>
+      </p:grpSpPr>
       <p:sp>
         <p:nvSpPr>
           <p:cNvPr id="2" name="TextBox 1"/>
@@ -4291,6 +4332,7 @@
           <a:lstStyle/>
           <a:p>
             <a:pPr algn="ctr"/>
+            <a:endParaRPr/>
           </a:p>
         </p:txBody>
       </p:sp>
@@ -4486,7 +4528,7 @@
 </file>
 
 <file path=ppt/slides/slide3.xml><?xml version="1.0" encoding="utf-8"?>
-<p:sld xmlns:a="http://schemas.openxmlformats.org/drawingml/2006/main" xmlns:p="http://schemas.openxmlformats.org/presentationml/2006/main" xmlns:r="http://schemas.openxmlformats.org/officeDocument/2006/relationships">
+<p:sld xmlns:a="http://schemas.openxmlformats.org/drawingml/2006/main" xmlns:r="http://schemas.openxmlformats.org/officeDocument/2006/relationships" xmlns:p="http://schemas.openxmlformats.org/presentationml/2006/main">
   <p:cSld>
     <p:spTree>
       <p:nvGrpSpPr>
@@ -4494,7 +4536,14 @@
         <p:cNvGrpSpPr/>
         <p:nvPr/>
       </p:nvGrpSpPr>
-      <p:grpSpPr/>
+      <p:grpSpPr>
+        <a:xfrm>
+          <a:off x="0" y="0"/>
+          <a:ext cx="0" cy="0"/>
+          <a:chOff x="0" y="0"/>
+          <a:chExt cx="0" cy="0"/>
+        </a:xfrm>
+      </p:grpSpPr>
       <p:sp>
         <p:nvSpPr>
           <p:cNvPr id="2" name="TextBox 1"/>
@@ -4568,6 +4617,7 @@
           <a:lstStyle/>
           <a:p>
             <a:pPr algn="ctr"/>
+            <a:endParaRPr/>
           </a:p>
         </p:txBody>
       </p:sp>
@@ -4771,7 +4821,7 @@
 </file>
 
 <file path=ppt/slides/slide4.xml><?xml version="1.0" encoding="utf-8"?>
-<p:sld xmlns:a="http://schemas.openxmlformats.org/drawingml/2006/main" xmlns:p="http://schemas.openxmlformats.org/presentationml/2006/main" xmlns:r="http://schemas.openxmlformats.org/officeDocument/2006/relationships">
+<p:sld xmlns:a="http://schemas.openxmlformats.org/drawingml/2006/main" xmlns:r="http://schemas.openxmlformats.org/officeDocument/2006/relationships" xmlns:p="http://schemas.openxmlformats.org/presentationml/2006/main">
   <p:cSld>
     <p:spTree>
       <p:nvGrpSpPr>
@@ -4779,7 +4829,14 @@
         <p:cNvGrpSpPr/>
         <p:nvPr/>
       </p:nvGrpSpPr>
-      <p:grpSpPr/>
+      <p:grpSpPr>
+        <a:xfrm>
+          <a:off x="0" y="0"/>
+          <a:ext cx="0" cy="0"/>
+          <a:chOff x="0" y="0"/>
+          <a:chExt cx="0" cy="0"/>
+        </a:xfrm>
+      </p:grpSpPr>
       <p:sp>
         <p:nvSpPr>
           <p:cNvPr id="2" name="TextBox 1"/>
@@ -4853,6 +4910,7 @@
           <a:lstStyle/>
           <a:p>
             <a:pPr algn="ctr"/>
+            <a:endParaRPr/>
           </a:p>
         </p:txBody>
       </p:sp>
@@ -4887,7 +4945,7 @@
               </a:spcAft>
             </a:pPr>
             <a:r>
-              <a:rPr sz="2000">
+              <a:rPr sz="2000" dirty="0">
                 <a:solidFill>
                   <a:srgbClr val="B0302A"/>
                 </a:solidFill>
@@ -4895,7 +4953,7 @@
               <a:t>•  </a:t>
             </a:r>
             <a:r>
-              <a:rPr sz="2000" b="0">
+              <a:rPr sz="2000" b="0" dirty="0">
                 <a:solidFill>
                   <a:srgbClr val="222222"/>
                 </a:solidFill>
@@ -4903,7 +4961,7 @@
               <a:t>Adapting by </a:t>
             </a:r>
             <a:r>
-              <a:rPr sz="2000" b="1">
+              <a:rPr sz="2000" b="1" dirty="0">
                 <a:solidFill>
                   <a:srgbClr val="B0302A"/>
                 </a:solidFill>
@@ -4911,7 +4969,7 @@
               <a:t>full fine-tuning</a:t>
             </a:r>
             <a:r>
-              <a:rPr sz="2000" b="0">
+              <a:rPr sz="2000" b="0" dirty="0">
                 <a:solidFill>
                   <a:srgbClr val="222222"/>
                 </a:solidFill>
@@ -4919,7 +4977,7 @@
               <a:t> stores a full copy of ~300M weights </a:t>
             </a:r>
             <a:r>
-              <a:rPr sz="2000" b="1">
+              <a:rPr sz="2000" b="1" dirty="0">
                 <a:solidFill>
                   <a:srgbClr val="B0302A"/>
                 </a:solidFill>
@@ -4927,7 +4985,7 @@
               <a:t>per language</a:t>
             </a:r>
             <a:r>
-              <a:rPr sz="2000" b="0">
+              <a:rPr sz="2000" b="0" dirty="0">
                 <a:solidFill>
                   <a:srgbClr val="222222"/>
                 </a:solidFill>
@@ -4945,7 +5003,7 @@
               </a:spcAft>
             </a:pPr>
             <a:r>
-              <a:rPr sz="2000">
+              <a:rPr sz="2000" dirty="0">
                 <a:solidFill>
                   <a:srgbClr val="B0302A"/>
                 </a:solidFill>
@@ -4953,7 +5011,7 @@
               <a:t>•  </a:t>
             </a:r>
             <a:r>
-              <a:rPr sz="2000" b="0">
+              <a:rPr sz="2000" b="0" dirty="0">
                 <a:solidFill>
                   <a:srgbClr val="222222"/>
                 </a:solidFill>
@@ -4961,7 +5019,7 @@
               <a:t>It can also </a:t>
             </a:r>
             <a:r>
-              <a:rPr sz="2000" b="1">
+              <a:rPr sz="2000" b="1" dirty="0">
                 <a:solidFill>
                   <a:srgbClr val="B0302A"/>
                 </a:solidFill>
@@ -4969,7 +5027,7 @@
               <a:t>overwrite</a:t>
             </a:r>
             <a:r>
-              <a:rPr sz="2000" b="0">
+              <a:rPr sz="2000" b="0" dirty="0">
                 <a:solidFill>
                   <a:srgbClr val="222222"/>
                 </a:solidFill>
@@ -4987,7 +5045,7 @@
               </a:spcAft>
             </a:pPr>
             <a:r>
-              <a:rPr sz="2000">
+              <a:rPr sz="2000" dirty="0">
                 <a:solidFill>
                   <a:srgbClr val="B0302A"/>
                 </a:solidFill>
@@ -4995,7 +5053,7 @@
               <a:t>•  </a:t>
             </a:r>
             <a:r>
-              <a:rPr sz="2000" b="1">
+              <a:rPr sz="2000" b="1" dirty="0">
                 <a:solidFill>
                   <a:srgbClr val="B0302A"/>
                 </a:solidFill>
@@ -5003,12 +5061,28 @@
               <a:t>Parameter-efficient fine-tuning (PEFT)</a:t>
             </a:r>
             <a:r>
-              <a:rPr sz="2000" b="0">
-                <a:solidFill>
-                  <a:srgbClr val="222222"/>
-                </a:solidFill>
-              </a:rPr>
-              <a:t> — LoRA, adapters — is standard for LLMs and ASR…</a:t>
+              <a:rPr sz="2000" b="0" dirty="0">
+                <a:solidFill>
+                  <a:srgbClr val="222222"/>
+                </a:solidFill>
+              </a:rPr>
+              <a:t> — </a:t>
+            </a:r>
+            <a:r>
+              <a:rPr sz="2000" b="0" dirty="0" err="1">
+                <a:solidFill>
+                  <a:srgbClr val="222222"/>
+                </a:solidFill>
+              </a:rPr>
+              <a:t>LoRA</a:t>
+            </a:r>
+            <a:r>
+              <a:rPr sz="2000" b="0" dirty="0">
+                <a:solidFill>
+                  <a:srgbClr val="222222"/>
+                </a:solidFill>
+              </a:rPr>
+              <a:t>, adapters — is standard for LLMs and ASR…</a:t>
             </a:r>
           </a:p>
           <a:p>
@@ -5021,7 +5095,7 @@
               </a:spcAft>
             </a:pPr>
             <a:r>
-              <a:rPr sz="2000">
+              <a:rPr sz="2000" dirty="0">
                 <a:solidFill>
                   <a:srgbClr val="B0302A"/>
                 </a:solidFill>
@@ -5029,7 +5103,7 @@
               <a:t>•  </a:t>
             </a:r>
             <a:r>
-              <a:rPr sz="2000" b="0">
+              <a:rPr sz="2000" b="0" dirty="0">
                 <a:solidFill>
                   <a:srgbClr val="222222"/>
                 </a:solidFill>
@@ -5037,7 +5111,7 @@
               <a:t>… but has </a:t>
             </a:r>
             <a:r>
-              <a:rPr sz="2000" b="1">
+              <a:rPr sz="2000" b="1" dirty="0">
                 <a:solidFill>
                   <a:srgbClr val="B0302A"/>
                 </a:solidFill>
@@ -5045,7 +5119,7 @@
               <a:t>not</a:t>
             </a:r>
             <a:r>
-              <a:rPr sz="2000" b="0">
+              <a:rPr sz="2000" b="0" dirty="0">
                 <a:solidFill>
                   <a:srgbClr val="222222"/>
                 </a:solidFill>
@@ -5053,7 +5127,7 @@
               <a:t> been adopted for G2P.   </a:t>
             </a:r>
             <a:r>
-              <a:rPr sz="2000" b="1">
+              <a:rPr sz="2000" b="1" dirty="0">
                 <a:solidFill>
                   <a:srgbClr val="B0302A"/>
                 </a:solidFill>
@@ -5072,7 +5146,7 @@
 </file>
 
 <file path=ppt/slides/slide5.xml><?xml version="1.0" encoding="utf-8"?>
-<p:sld xmlns:a="http://schemas.openxmlformats.org/drawingml/2006/main" xmlns:p="http://schemas.openxmlformats.org/presentationml/2006/main" xmlns:r="http://schemas.openxmlformats.org/officeDocument/2006/relationships">
+<p:sld xmlns:a="http://schemas.openxmlformats.org/drawingml/2006/main" xmlns:r="http://schemas.openxmlformats.org/officeDocument/2006/relationships" xmlns:p="http://schemas.openxmlformats.org/presentationml/2006/main">
   <p:cSld>
     <p:spTree>
       <p:nvGrpSpPr>
@@ -5080,7 +5154,14 @@
         <p:cNvGrpSpPr/>
         <p:nvPr/>
       </p:nvGrpSpPr>
-      <p:grpSpPr/>
+      <p:grpSpPr>
+        <a:xfrm>
+          <a:off x="0" y="0"/>
+          <a:ext cx="0" cy="0"/>
+          <a:chOff x="0" y="0"/>
+          <a:chExt cx="0" cy="0"/>
+        </a:xfrm>
+      </p:grpSpPr>
       <p:sp>
         <p:nvSpPr>
           <p:cNvPr id="2" name="TextBox 1"/>
@@ -5154,6 +5235,7 @@
           <a:lstStyle/>
           <a:p>
             <a:pPr algn="ctr"/>
+            <a:endParaRPr/>
           </a:p>
         </p:txBody>
       </p:sp>
@@ -5195,7 +5277,7 @@
           </a:fontRef>
         </p:style>
         <p:txBody>
-          <a:bodyPr rtlCol="0" anchor="ctr" wrap="square" lIns="365760" rIns="365760"/>
+          <a:bodyPr wrap="square" lIns="365760" rIns="365760" rtlCol="0" anchor="ctr"/>
           <a:lstStyle/>
           <a:p>
             <a:pPr algn="ctr"/>
@@ -5358,7 +5440,7 @@
 </file>
 
 <file path=ppt/slides/slide6.xml><?xml version="1.0" encoding="utf-8"?>
-<p:sld xmlns:a="http://schemas.openxmlformats.org/drawingml/2006/main" xmlns:p="http://schemas.openxmlformats.org/presentationml/2006/main" xmlns:r="http://schemas.openxmlformats.org/officeDocument/2006/relationships">
+<p:sld xmlns:a="http://schemas.openxmlformats.org/drawingml/2006/main" xmlns:r="http://schemas.openxmlformats.org/officeDocument/2006/relationships" xmlns:p="http://schemas.openxmlformats.org/presentationml/2006/main">
   <p:cSld>
     <p:spTree>
       <p:nvGrpSpPr>
@@ -5366,7 +5448,14 @@
         <p:cNvGrpSpPr/>
         <p:nvPr/>
       </p:nvGrpSpPr>
-      <p:grpSpPr/>
+      <p:grpSpPr>
+        <a:xfrm>
+          <a:off x="0" y="0"/>
+          <a:ext cx="0" cy="0"/>
+          <a:chOff x="0" y="0"/>
+          <a:chExt cx="0" cy="0"/>
+        </a:xfrm>
+      </p:grpSpPr>
       <p:sp>
         <p:nvSpPr>
           <p:cNvPr id="2" name="TextBox 1"/>
@@ -5440,6 +5529,7 @@
           <a:lstStyle/>
           <a:p>
             <a:pPr algn="ctr"/>
+            <a:endParaRPr/>
           </a:p>
         </p:txBody>
       </p:sp>
@@ -5474,7 +5564,7 @@
               </a:spcAft>
             </a:pPr>
             <a:r>
-              <a:rPr sz="1900">
+              <a:rPr sz="1900" dirty="0">
                 <a:solidFill>
                   <a:srgbClr val="B0302A"/>
                 </a:solidFill>
@@ -5482,7 +5572,7 @@
               <a:t>•  </a:t>
             </a:r>
             <a:r>
-              <a:rPr sz="1900" b="0">
+              <a:rPr sz="1900" b="0" dirty="0">
                 <a:solidFill>
                   <a:srgbClr val="222222"/>
                 </a:solidFill>
@@ -5490,7 +5580,7 @@
               <a:t>Base model: </a:t>
             </a:r>
             <a:r>
-              <a:rPr sz="1900" b="1">
+              <a:rPr sz="1900" b="1" dirty="0">
                 <a:solidFill>
                   <a:srgbClr val="B0302A"/>
                 </a:solidFill>
@@ -5498,7 +5588,7 @@
               <a:t>CharsiuG2P ByT5-small</a:t>
             </a:r>
             <a:r>
-              <a:rPr sz="1900" b="0">
+              <a:rPr sz="1900" b="0" dirty="0">
                 <a:solidFill>
                   <a:srgbClr val="222222"/>
                 </a:solidFill>
@@ -5516,7 +5606,7 @@
               </a:spcAft>
             </a:pPr>
             <a:r>
-              <a:rPr sz="1700">
+              <a:rPr sz="1700" dirty="0">
                 <a:solidFill>
                   <a:srgbClr val="222222"/>
                 </a:solidFill>
@@ -5524,7 +5614,7 @@
               <a:t>      –  </a:t>
             </a:r>
             <a:r>
-              <a:rPr sz="1700" b="1">
+              <a:rPr sz="1700" b="1" dirty="0">
                 <a:solidFill>
                   <a:srgbClr val="B0302A"/>
                 </a:solidFill>
@@ -5532,7 +5622,7 @@
               <a:t>Zero-shot</a:t>
             </a:r>
             <a:r>
-              <a:rPr sz="1700" b="0">
+              <a:rPr sz="1700" b="0" dirty="0">
                 <a:solidFill>
                   <a:srgbClr val="222222"/>
                 </a:solidFill>
@@ -5550,7 +5640,7 @@
               </a:spcAft>
             </a:pPr>
             <a:r>
-              <a:rPr sz="1700">
+              <a:rPr sz="1700" dirty="0">
                 <a:solidFill>
                   <a:srgbClr val="222222"/>
                 </a:solidFill>
@@ -5558,7 +5648,7 @@
               <a:t>      –  </a:t>
             </a:r>
             <a:r>
-              <a:rPr sz="1700" b="1">
+              <a:rPr sz="1700" b="1" dirty="0">
                 <a:solidFill>
                   <a:srgbClr val="B0302A"/>
                 </a:solidFill>
@@ -5566,7 +5656,7 @@
               <a:t>Frozen head</a:t>
             </a:r>
             <a:r>
-              <a:rPr sz="1700" b="0">
+              <a:rPr sz="1700" b="0" dirty="0">
                 <a:solidFill>
                   <a:srgbClr val="222222"/>
                 </a:solidFill>
@@ -5584,7 +5674,7 @@
               </a:spcAft>
             </a:pPr>
             <a:r>
-              <a:rPr sz="1700">
+              <a:rPr sz="1700" dirty="0">
                 <a:solidFill>
                   <a:srgbClr val="222222"/>
                 </a:solidFill>
@@ -5592,7 +5682,7 @@
               <a:t>      –  </a:t>
             </a:r>
             <a:r>
-              <a:rPr sz="1700" b="1">
+              <a:rPr sz="1700" b="1" dirty="0" err="1">
                 <a:solidFill>
                   <a:srgbClr val="B0302A"/>
                 </a:solidFill>
@@ -5600,7 +5690,7 @@
               <a:t>LoRA</a:t>
             </a:r>
             <a:r>
-              <a:rPr sz="1700" b="0">
+              <a:rPr sz="1700" b="0" dirty="0">
                 <a:solidFill>
                   <a:srgbClr val="222222"/>
                 </a:solidFill>
@@ -5618,7 +5708,7 @@
               </a:spcAft>
             </a:pPr>
             <a:r>
-              <a:rPr sz="1700">
+              <a:rPr sz="1700" dirty="0">
                 <a:solidFill>
                   <a:srgbClr val="222222"/>
                 </a:solidFill>
@@ -5626,7 +5716,7 @@
               <a:t>      –  </a:t>
             </a:r>
             <a:r>
-              <a:rPr sz="1700" b="1">
+              <a:rPr sz="1700" b="1" dirty="0">
                 <a:solidFill>
                   <a:srgbClr val="B0302A"/>
                 </a:solidFill>
@@ -5634,7 +5724,7 @@
               <a:t>Full fine-tuning</a:t>
             </a:r>
             <a:r>
-              <a:rPr sz="1700" b="0">
+              <a:rPr sz="1700" b="0" dirty="0">
                 <a:solidFill>
                   <a:srgbClr val="222222"/>
                 </a:solidFill>
@@ -5652,7 +5742,7 @@
               </a:spcAft>
             </a:pPr>
             <a:r>
-              <a:rPr sz="1900">
+              <a:rPr sz="1900" dirty="0">
                 <a:solidFill>
                   <a:srgbClr val="B0302A"/>
                 </a:solidFill>
@@ -5660,12 +5750,44 @@
               <a:t>•  </a:t>
             </a:r>
             <a:r>
-              <a:rPr sz="1900" b="0">
-                <a:solidFill>
-                  <a:srgbClr val="222222"/>
-                </a:solidFill>
-              </a:rPr>
-              <a:t>Greedy decoding; input prompt  &lt;ron&gt;:  /  &lt;gre&gt;: .</a:t>
+              <a:rPr sz="1900" b="0" dirty="0">
+                <a:solidFill>
+                  <a:srgbClr val="222222"/>
+                </a:solidFill>
+              </a:rPr>
+              <a:t>Greedy decoding; input prompt  &lt;</a:t>
+            </a:r>
+            <a:r>
+              <a:rPr sz="1900" b="0" dirty="0" err="1">
+                <a:solidFill>
+                  <a:srgbClr val="222222"/>
+                </a:solidFill>
+              </a:rPr>
+              <a:t>ron</a:t>
+            </a:r>
+            <a:r>
+              <a:rPr sz="1900" b="0" dirty="0">
+                <a:solidFill>
+                  <a:srgbClr val="222222"/>
+                </a:solidFill>
+              </a:rPr>
+              <a:t>&gt;:  /  &lt;</a:t>
+            </a:r>
+            <a:r>
+              <a:rPr sz="1900" b="0" dirty="0" err="1">
+                <a:solidFill>
+                  <a:srgbClr val="222222"/>
+                </a:solidFill>
+              </a:rPr>
+              <a:t>gre</a:t>
+            </a:r>
+            <a:r>
+              <a:rPr sz="1900" b="0" dirty="0">
+                <a:solidFill>
+                  <a:srgbClr val="222222"/>
+                </a:solidFill>
+              </a:rPr>
+              <a:t>&gt;: .</a:t>
             </a:r>
           </a:p>
         </p:txBody>
@@ -5679,7 +5801,7 @@
 </file>
 
 <file path=ppt/slides/slide7.xml><?xml version="1.0" encoding="utf-8"?>
-<p:sld xmlns:a="http://schemas.openxmlformats.org/drawingml/2006/main" xmlns:p="http://schemas.openxmlformats.org/presentationml/2006/main" xmlns:r="http://schemas.openxmlformats.org/officeDocument/2006/relationships">
+<p:sld xmlns:a="http://schemas.openxmlformats.org/drawingml/2006/main" xmlns:r="http://schemas.openxmlformats.org/officeDocument/2006/relationships" xmlns:p="http://schemas.openxmlformats.org/presentationml/2006/main">
   <p:cSld>
     <p:spTree>
       <p:nvGrpSpPr>
@@ -5687,7 +5809,14 @@
         <p:cNvGrpSpPr/>
         <p:nvPr/>
       </p:nvGrpSpPr>
-      <p:grpSpPr/>
+      <p:grpSpPr>
+        <a:xfrm>
+          <a:off x="0" y="0"/>
+          <a:ext cx="0" cy="0"/>
+          <a:chOff x="0" y="0"/>
+          <a:chExt cx="0" cy="0"/>
+        </a:xfrm>
+      </p:grpSpPr>
       <p:sp>
         <p:nvSpPr>
           <p:cNvPr id="2" name="TextBox 1"/>
@@ -5761,6 +5890,7 @@
           <a:lstStyle/>
           <a:p>
             <a:pPr algn="ctr"/>
+            <a:endParaRPr/>
           </a:p>
         </p:txBody>
       </p:sp>
@@ -5773,7 +5903,7 @@
         <p:spPr>
           <a:xfrm>
             <a:off x="731520" y="1417320"/>
-            <a:ext cx="10789920" cy="4937760"/>
+            <a:ext cx="10789920" cy="1692771"/>
           </a:xfrm>
           <a:prstGeom prst="rect">
             <a:avLst/>
@@ -5795,7 +5925,7 @@
               </a:spcAft>
             </a:pPr>
             <a:r>
-              <a:rPr sz="1900">
+              <a:rPr sz="1900" dirty="0">
                 <a:solidFill>
                   <a:srgbClr val="B0302A"/>
                 </a:solidFill>
@@ -5803,7 +5933,7 @@
               <a:t>•  </a:t>
             </a:r>
             <a:r>
-              <a:rPr sz="1900" b="1">
+              <a:rPr sz="1900" b="1" dirty="0">
                 <a:solidFill>
                   <a:srgbClr val="B0302A"/>
                 </a:solidFill>
@@ -5811,7 +5941,7 @@
               <a:t>SIGMORPHON 2021</a:t>
             </a:r>
             <a:r>
-              <a:rPr sz="1900" b="0">
+              <a:rPr sz="1900" b="0" dirty="0">
                 <a:solidFill>
                   <a:srgbClr val="222222"/>
                 </a:solidFill>
@@ -5829,7 +5959,7 @@
               </a:spcAft>
             </a:pPr>
             <a:r>
-              <a:rPr sz="1700">
+              <a:rPr sz="1700" dirty="0">
                 <a:solidFill>
                   <a:srgbClr val="222222"/>
                 </a:solidFill>
@@ -5837,7 +5967,7 @@
               <a:t>      –  </a:t>
             </a:r>
             <a:r>
-              <a:rPr sz="1700" b="0">
+              <a:rPr sz="1700" b="0" dirty="0">
                 <a:solidFill>
                   <a:srgbClr val="222222"/>
                 </a:solidFill>
@@ -5855,7 +5985,7 @@
               </a:spcAft>
             </a:pPr>
             <a:r>
-              <a:rPr sz="1900">
+              <a:rPr sz="1900" dirty="0">
                 <a:solidFill>
                   <a:srgbClr val="B0302A"/>
                 </a:solidFill>
@@ -5863,7 +5993,7 @@
               <a:t>•  </a:t>
             </a:r>
             <a:r>
-              <a:rPr sz="1900" b="1">
+              <a:rPr sz="1900" b="1" dirty="0">
                 <a:solidFill>
                   <a:srgbClr val="B0302A"/>
                 </a:solidFill>
@@ -5871,7 +6001,7 @@
               <a:t>Metrics:</a:t>
             </a:r>
             <a:r>
-              <a:rPr sz="1900" b="0">
+              <a:rPr sz="1900" b="0" dirty="0">
                 <a:solidFill>
                   <a:srgbClr val="222222"/>
                 </a:solidFill>
@@ -5879,7 +6009,7 @@
               <a:t> PER (character-level edit rate) and WER; </a:t>
             </a:r>
             <a:r>
-              <a:rPr sz="1900" b="1">
+              <a:rPr sz="1900" b="1" dirty="0">
                 <a:solidFill>
                   <a:srgbClr val="B0302A"/>
                 </a:solidFill>
@@ -5887,12 +6017,28 @@
               <a:t>forgetting</a:t>
             </a:r>
             <a:r>
-              <a:rPr sz="1900" b="0">
-                <a:solidFill>
-                  <a:srgbClr val="222222"/>
-                </a:solidFill>
-              </a:rPr>
-              <a:t> on held-out English (eng-us) IPA.</a:t>
+              <a:rPr sz="1900" b="0" dirty="0">
+                <a:solidFill>
+                  <a:srgbClr val="222222"/>
+                </a:solidFill>
+              </a:rPr>
+              <a:t> on held-out English (</a:t>
+            </a:r>
+            <a:r>
+              <a:rPr sz="1900" b="0" dirty="0" err="1">
+                <a:solidFill>
+                  <a:srgbClr val="222222"/>
+                </a:solidFill>
+              </a:rPr>
+              <a:t>eng</a:t>
+            </a:r>
+            <a:r>
+              <a:rPr sz="1900" b="0" dirty="0">
+                <a:solidFill>
+                  <a:srgbClr val="222222"/>
+                </a:solidFill>
+              </a:rPr>
+              <a:t>-us) IPA.</a:t>
             </a:r>
           </a:p>
           <a:p>
@@ -5905,7 +6051,7 @@
               </a:spcAft>
             </a:pPr>
             <a:r>
-              <a:rPr sz="1900">
+              <a:rPr sz="1900" dirty="0">
                 <a:solidFill>
                   <a:srgbClr val="B0302A"/>
                 </a:solidFill>
@@ -5913,7 +6059,7 @@
               <a:t>•  </a:t>
             </a:r>
             <a:r>
-              <a:rPr sz="1900" b="1">
+              <a:rPr sz="1900" b="1" dirty="0">
                 <a:solidFill>
                   <a:srgbClr val="B0302A"/>
                 </a:solidFill>
@@ -5921,70 +6067,44 @@
               <a:t>Compute:</a:t>
             </a:r>
             <a:r>
-              <a:rPr sz="1900" b="0">
-                <a:solidFill>
-                  <a:srgbClr val="222222"/>
-                </a:solidFill>
-              </a:rPr>
-              <a:t> Kaggle dual T4 GPUs; HuggingFace transformers + peft.</a:t>
-            </a:r>
-          </a:p>
-          <a:p>
-            <a:pPr>
-              <a:spcBef>
-                <a:spcPts val="200"/>
-              </a:spcBef>
-              <a:spcAft>
-                <a:spcPts val="1000"/>
-              </a:spcAft>
-            </a:pPr>
-            <a:r>
-              <a:rPr sz="1900">
-                <a:solidFill>
-                  <a:srgbClr val="B0302A"/>
-                </a:solidFill>
-              </a:rPr>
-              <a:t>•  </a:t>
-            </a:r>
-            <a:r>
-              <a:rPr sz="1900" b="0">
-                <a:solidFill>
-                  <a:srgbClr val="222222"/>
-                </a:solidFill>
-              </a:rPr>
-              <a:t>Two fixes that mattered: the tag </a:t>
-            </a:r>
-            <a:r>
-              <a:rPr sz="1900" b="1">
-                <a:solidFill>
-                  <a:srgbClr val="B0302A"/>
-                </a:solidFill>
-              </a:rPr>
-              <a:t>&lt;ron&gt;</a:t>
-            </a:r>
-            <a:r>
-              <a:rPr sz="1900" b="0">
-                <a:solidFill>
-                  <a:srgbClr val="222222"/>
-                </a:solidFill>
-              </a:rPr>
-              <a:t> (not file code rum: 5.96 vs 24.76 dev PER), and </a:t>
-            </a:r>
-            <a:r>
-              <a:rPr sz="1900" b="1">
-                <a:solidFill>
-                  <a:srgbClr val="B0302A"/>
-                </a:solidFill>
-              </a:rPr>
-              <a:t>character-level</a:t>
-            </a:r>
-            <a:r>
-              <a:rPr sz="1900" b="0">
-                <a:solidFill>
-                  <a:srgbClr val="222222"/>
-                </a:solidFill>
-              </a:rPr>
-              <a:t> scoring so the un-delimited zero-shot output is comparable.</a:t>
+              <a:rPr sz="1900" b="0" dirty="0">
+                <a:solidFill>
+                  <a:srgbClr val="222222"/>
+                </a:solidFill>
+              </a:rPr>
+              <a:t> Kaggle dual T4 GPUs; </a:t>
+            </a:r>
+            <a:r>
+              <a:rPr sz="1900" b="0" dirty="0" err="1">
+                <a:solidFill>
+                  <a:srgbClr val="222222"/>
+                </a:solidFill>
+              </a:rPr>
+              <a:t>HuggingFace</a:t>
+            </a:r>
+            <a:r>
+              <a:rPr sz="1900" b="0" dirty="0">
+                <a:solidFill>
+                  <a:srgbClr val="222222"/>
+                </a:solidFill>
+              </a:rPr>
+              <a:t> transformers + </a:t>
+            </a:r>
+            <a:r>
+              <a:rPr sz="1900" b="0" dirty="0" err="1">
+                <a:solidFill>
+                  <a:srgbClr val="222222"/>
+                </a:solidFill>
+              </a:rPr>
+              <a:t>peft</a:t>
+            </a:r>
+            <a:r>
+              <a:rPr sz="1900" b="0" dirty="0">
+                <a:solidFill>
+                  <a:srgbClr val="222222"/>
+                </a:solidFill>
+              </a:rPr>
+              <a:t>.</a:t>
             </a:r>
           </a:p>
         </p:txBody>
@@ -5998,7 +6118,7 @@
 </file>
 
 <file path=ppt/slides/slide8.xml><?xml version="1.0" encoding="utf-8"?>
-<p:sld xmlns:a="http://schemas.openxmlformats.org/drawingml/2006/main" xmlns:p="http://schemas.openxmlformats.org/presentationml/2006/main" xmlns:r="http://schemas.openxmlformats.org/officeDocument/2006/relationships">
+<p:sld xmlns:a="http://schemas.openxmlformats.org/drawingml/2006/main" xmlns:r="http://schemas.openxmlformats.org/officeDocument/2006/relationships" xmlns:p="http://schemas.openxmlformats.org/presentationml/2006/main">
   <p:cSld>
     <p:spTree>
       <p:nvGrpSpPr>
@@ -6006,7 +6126,14 @@
         <p:cNvGrpSpPr/>
         <p:nvPr/>
       </p:nvGrpSpPr>
-      <p:grpSpPr/>
+      <p:grpSpPr>
+        <a:xfrm>
+          <a:off x="0" y="0"/>
+          <a:ext cx="0" cy="0"/>
+          <a:chOff x="0" y="0"/>
+          <a:chExt cx="0" cy="0"/>
+        </a:xfrm>
+      </p:grpSpPr>
       <p:sp>
         <p:nvSpPr>
           <p:cNvPr id="2" name="TextBox 1"/>
@@ -6080,6 +6207,7 @@
           <a:lstStyle/>
           <a:p>
             <a:pPr algn="ctr"/>
+            <a:endParaRPr/>
           </a:p>
         </p:txBody>
       </p:sp>
@@ -6102,11 +6230,41 @@
                 <a:tableStyleId>{5C22544A-7EE6-4342-B048-85BDC9FD1C3A}</a:tableStyleId>
               </a:tblPr>
               <a:tblGrid>
-                <a:gridCol w="3200400"/>
-                <a:gridCol w="1737360"/>
-                <a:gridCol w="1737360"/>
-                <a:gridCol w="1737360"/>
-                <a:gridCol w="1737360"/>
+                <a:gridCol w="3200400">
+                  <a:extLst>
+                    <a:ext uri="{9D8B030D-6E8A-4147-A177-3AD203B41FA5}">
+                      <a16:colId xmlns:a16="http://schemas.microsoft.com/office/drawing/2014/main" val="20000"/>
+                    </a:ext>
+                  </a:extLst>
+                </a:gridCol>
+                <a:gridCol w="1737360">
+                  <a:extLst>
+                    <a:ext uri="{9D8B030D-6E8A-4147-A177-3AD203B41FA5}">
+                      <a16:colId xmlns:a16="http://schemas.microsoft.com/office/drawing/2014/main" val="20001"/>
+                    </a:ext>
+                  </a:extLst>
+                </a:gridCol>
+                <a:gridCol w="1737360">
+                  <a:extLst>
+                    <a:ext uri="{9D8B030D-6E8A-4147-A177-3AD203B41FA5}">
+                      <a16:colId xmlns:a16="http://schemas.microsoft.com/office/drawing/2014/main" val="20002"/>
+                    </a:ext>
+                  </a:extLst>
+                </a:gridCol>
+                <a:gridCol w="1737360">
+                  <a:extLst>
+                    <a:ext uri="{9D8B030D-6E8A-4147-A177-3AD203B41FA5}">
+                      <a16:colId xmlns:a16="http://schemas.microsoft.com/office/drawing/2014/main" val="20003"/>
+                    </a:ext>
+                  </a:extLst>
+                </a:gridCol>
+                <a:gridCol w="1737360">
+                  <a:extLst>
+                    <a:ext uri="{9D8B030D-6E8A-4147-A177-3AD203B41FA5}">
+                      <a16:colId xmlns:a16="http://schemas.microsoft.com/office/drawing/2014/main" val="20004"/>
+                    </a:ext>
+                  </a:extLst>
+                </a:gridCol>
               </a:tblGrid>
               <a:tr h="444137">
                 <a:tc>
@@ -6116,7 +6274,7 @@
                     <a:p>
                       <a:pPr algn="l"/>
                       <a:r>
-                        <a:rPr b="1" sz="1500">
+                        <a:rPr sz="1500" b="1">
                           <a:solidFill>
                             <a:srgbClr val="FFFFFF"/>
                           </a:solidFill>
@@ -6138,7 +6296,7 @@
                     <a:p>
                       <a:pPr algn="ctr"/>
                       <a:r>
-                        <a:rPr b="1" sz="1500">
+                        <a:rPr sz="1500" b="1">
                           <a:solidFill>
                             <a:srgbClr val="FFFFFF"/>
                           </a:solidFill>
@@ -6160,7 +6318,7 @@
                     <a:p>
                       <a:pPr algn="ctr"/>
                       <a:r>
-                        <a:rPr b="1" sz="1500">
+                        <a:rPr sz="1500" b="1">
                           <a:solidFill>
                             <a:srgbClr val="FFFFFF"/>
                           </a:solidFill>
@@ -6182,7 +6340,7 @@
                     <a:p>
                       <a:pPr algn="ctr"/>
                       <a:r>
-                        <a:rPr b="1" sz="1500">
+                        <a:rPr sz="1500" b="1">
                           <a:solidFill>
                             <a:srgbClr val="FFFFFF"/>
                           </a:solidFill>
@@ -6204,7 +6362,7 @@
                     <a:p>
                       <a:pPr algn="ctr"/>
                       <a:r>
-                        <a:rPr b="1" sz="1500">
+                        <a:rPr sz="1500" b="1">
                           <a:solidFill>
                             <a:srgbClr val="FFFFFF"/>
                           </a:solidFill>
@@ -6219,6 +6377,11 @@
                     </a:solidFill>
                   </a:tcPr>
                 </a:tc>
+                <a:extLst>
+                  <a:ext uri="{0D108BD9-81ED-4DB2-BD59-A6C34878D82A}">
+                    <a16:rowId xmlns:a16="http://schemas.microsoft.com/office/drawing/2014/main" val="10000"/>
+                  </a:ext>
+                </a:extLst>
               </a:tr>
               <a:tr h="444137">
                 <a:tc>
@@ -6331,6 +6494,11 @@
                     </a:solidFill>
                   </a:tcPr>
                 </a:tc>
+                <a:extLst>
+                  <a:ext uri="{0D108BD9-81ED-4DB2-BD59-A6C34878D82A}">
+                    <a16:rowId xmlns:a16="http://schemas.microsoft.com/office/drawing/2014/main" val="10001"/>
+                  </a:ext>
+                </a:extLst>
               </a:tr>
               <a:tr h="444137">
                 <a:tc>
@@ -6443,6 +6611,11 @@
                     </a:solidFill>
                   </a:tcPr>
                 </a:tc>
+                <a:extLst>
+                  <a:ext uri="{0D108BD9-81ED-4DB2-BD59-A6C34878D82A}">
+                    <a16:rowId xmlns:a16="http://schemas.microsoft.com/office/drawing/2014/main" val="10002"/>
+                  </a:ext>
+                </a:extLst>
               </a:tr>
               <a:tr h="444137">
                 <a:tc>
@@ -6555,6 +6728,11 @@
                     </a:solidFill>
                   </a:tcPr>
                 </a:tc>
+                <a:extLst>
+                  <a:ext uri="{0D108BD9-81ED-4DB2-BD59-A6C34878D82A}">
+                    <a16:rowId xmlns:a16="http://schemas.microsoft.com/office/drawing/2014/main" val="10003"/>
+                  </a:ext>
+                </a:extLst>
               </a:tr>
               <a:tr h="444137">
                 <a:tc>
@@ -6667,6 +6845,11 @@
                     </a:solidFill>
                   </a:tcPr>
                 </a:tc>
+                <a:extLst>
+                  <a:ext uri="{0D108BD9-81ED-4DB2-BD59-A6C34878D82A}">
+                    <a16:rowId xmlns:a16="http://schemas.microsoft.com/office/drawing/2014/main" val="10004"/>
+                  </a:ext>
+                </a:extLst>
               </a:tr>
               <a:tr h="444137">
                 <a:tc>
@@ -6779,6 +6962,11 @@
                     </a:solidFill>
                   </a:tcPr>
                 </a:tc>
+                <a:extLst>
+                  <a:ext uri="{0D108BD9-81ED-4DB2-BD59-A6C34878D82A}">
+                    <a16:rowId xmlns:a16="http://schemas.microsoft.com/office/drawing/2014/main" val="10005"/>
+                  </a:ext>
+                </a:extLst>
               </a:tr>
               <a:tr h="444138">
                 <a:tc>
@@ -6891,6 +7079,11 @@
                     </a:solidFill>
                   </a:tcPr>
                 </a:tc>
+                <a:extLst>
+                  <a:ext uri="{0D108BD9-81ED-4DB2-BD59-A6C34878D82A}">
+                    <a16:rowId xmlns:a16="http://schemas.microsoft.com/office/drawing/2014/main" val="10006"/>
+                  </a:ext>
+                </a:extLst>
               </a:tr>
             </a:tbl>
           </a:graphicData>
@@ -7012,7 +7205,7 @@
 </file>
 
 <file path=ppt/slides/slide9.xml><?xml version="1.0" encoding="utf-8"?>
-<p:sld xmlns:a="http://schemas.openxmlformats.org/drawingml/2006/main" xmlns:p="http://schemas.openxmlformats.org/presentationml/2006/main" xmlns:r="http://schemas.openxmlformats.org/officeDocument/2006/relationships">
+<p:sld xmlns:a="http://schemas.openxmlformats.org/drawingml/2006/main" xmlns:r="http://schemas.openxmlformats.org/officeDocument/2006/relationships" xmlns:p="http://schemas.openxmlformats.org/presentationml/2006/main">
   <p:cSld>
     <p:spTree>
       <p:nvGrpSpPr>
@@ -7020,7 +7213,14 @@
         <p:cNvGrpSpPr/>
         <p:nvPr/>
       </p:nvGrpSpPr>
-      <p:grpSpPr/>
+      <p:grpSpPr>
+        <a:xfrm>
+          <a:off x="0" y="0"/>
+          <a:ext cx="0" cy="0"/>
+          <a:chOff x="0" y="0"/>
+          <a:chExt cx="0" cy="0"/>
+        </a:xfrm>
+      </p:grpSpPr>
       <p:sp>
         <p:nvSpPr>
           <p:cNvPr id="2" name="TextBox 1"/>
@@ -7094,6 +7294,7 @@
           <a:lstStyle/>
           <a:p>
             <a:pPr algn="ctr"/>
+            <a:endParaRPr/>
           </a:p>
         </p:txBody>
       </p:sp>
